--- a/dsa_sparse_kvcache_editable.pptx
+++ b/dsa_sparse_kvcache_editable.pptx
@@ -1088,7 +1088,7 @@
                 <a:ea typeface="PingFang SC" pitchFamily="34" charset="-122"/>
                 <a:cs typeface="PingFang SC" pitchFamily="34" charset="-120"/>
               </a:rPr>
-              <a:t>NPU侧开销：控制面进入Decode热路径</a:t>
+              <a:t>NPU侧开销：DSA选择与控制面进入Decode热路径</a:t>
             </a:r>
             <a:endParaRPr lang="en-US" sz="2800" dirty="0"/>
           </a:p>
@@ -1179,11 +1179,11 @@
             </a:avLst>
           </a:prstGeom>
           <a:solidFill>
-            <a:srgbClr val="FFFFFF"/>
+            <a:srgbClr val="FFF0F0"/>
           </a:solidFill>
           <a:ln w="17780">
             <a:solidFill>
-              <a:srgbClr val="1F5FD1"/>
+              <a:srgbClr val="C51414"/>
             </a:solidFill>
             <a:prstDash val="solid"/>
           </a:ln>
@@ -1198,142 +1198,6 @@
         <p:spPr>
           <a:xfrm>
             <a:off x="2121408" y="1627632"/>
-            <a:ext cx="1197864" cy="502920"/>
-          </a:xfrm>
-          <a:prstGeom prst="rect">
-            <a:avLst/>
-          </a:prstGeom>
-          <a:noFill/>
-          <a:ln/>
-        </p:spPr>
-        <p:txBody>
-          <a:bodyPr wrap="square" lIns="508" tIns="508" rIns="508" bIns="508" rtlCol="0" anchor="ctr">
-            <a:normAutofit/>
-          </a:bodyPr>
-          <a:lstStyle/>
-          <a:p>
-            <a:pPr algn="ctr" indent="0" marL="0">
-              <a:buNone/>
-            </a:pPr>
-            <a:r>
-              <a:rPr lang="en-US" sz="1600" b="1" dirty="0">
-                <a:solidFill>
-                  <a:srgbClr val="08245C"/>
-                </a:solidFill>
-                <a:latin typeface="PingFang SC" pitchFamily="34" charset="0"/>
-                <a:ea typeface="PingFang SC" pitchFamily="34" charset="-122"/>
-                <a:cs typeface="PingFang SC" pitchFamily="34" charset="-120"/>
-              </a:rPr>
-              <a:t>稀疏选择</a:t>
-            </a:r>
-            <a:endParaRPr lang="en-US" sz="1600" dirty="0"/>
-          </a:p>
-        </p:txBody>
-      </p:sp>
-      <p:sp>
-        <p:nvSpPr>
-          <p:cNvPr id="7" name="Shape 5"/>
-          <p:cNvSpPr/>
-          <p:nvPr/>
-        </p:nvSpPr>
-        <p:spPr>
-          <a:xfrm>
-            <a:off x="3703320" y="1417320"/>
-            <a:ext cx="1417320" cy="2788920"/>
-          </a:xfrm>
-          <a:prstGeom prst="roundRect">
-            <a:avLst>
-              <a:gd name="adj" fmla="val 7742"/>
-            </a:avLst>
-          </a:prstGeom>
-          <a:solidFill>
-            <a:srgbClr val="FFFFFF"/>
-          </a:solidFill>
-          <a:ln w="17780">
-            <a:solidFill>
-              <a:srgbClr val="1F5FD1"/>
-            </a:solidFill>
-            <a:prstDash val="solid"/>
-          </a:ln>
-        </p:spPr>
-      </p:sp>
-      <p:sp>
-        <p:nvSpPr>
-          <p:cNvPr id="8" name="Text 6"/>
-          <p:cNvSpPr/>
-          <p:nvPr/>
-        </p:nvSpPr>
-        <p:spPr>
-          <a:xfrm>
-            <a:off x="3813048" y="1627632"/>
-            <a:ext cx="1197864" cy="502920"/>
-          </a:xfrm>
-          <a:prstGeom prst="rect">
-            <a:avLst/>
-          </a:prstGeom>
-          <a:noFill/>
-          <a:ln/>
-        </p:spPr>
-        <p:txBody>
-          <a:bodyPr wrap="square" lIns="508" tIns="508" rIns="508" bIns="508" rtlCol="0" anchor="ctr">
-            <a:normAutofit/>
-          </a:bodyPr>
-          <a:lstStyle/>
-          <a:p>
-            <a:pPr algn="ctr" indent="0" marL="0">
-              <a:buNone/>
-            </a:pPr>
-            <a:r>
-              <a:rPr lang="en-US" sz="1600" b="1" dirty="0">
-                <a:solidFill>
-                  <a:srgbClr val="08245C"/>
-                </a:solidFill>
-                <a:latin typeface="PingFang SC" pitchFamily="34" charset="0"/>
-                <a:ea typeface="PingFang SC" pitchFamily="34" charset="-122"/>
-                <a:cs typeface="PingFang SC" pitchFamily="34" charset="-120"/>
-              </a:rPr>
-              <a:t>地址生成</a:t>
-            </a:r>
-            <a:endParaRPr lang="en-US" sz="1600" dirty="0"/>
-          </a:p>
-        </p:txBody>
-      </p:sp>
-      <p:sp>
-        <p:nvSpPr>
-          <p:cNvPr id="9" name="Shape 7"/>
-          <p:cNvSpPr/>
-          <p:nvPr/>
-        </p:nvSpPr>
-        <p:spPr>
-          <a:xfrm>
-            <a:off x="5394960" y="1417320"/>
-            <a:ext cx="1417320" cy="2788920"/>
-          </a:xfrm>
-          <a:prstGeom prst="roundRect">
-            <a:avLst>
-              <a:gd name="adj" fmla="val 7742"/>
-            </a:avLst>
-          </a:prstGeom>
-          <a:solidFill>
-            <a:srgbClr val="FFF0F0"/>
-          </a:solidFill>
-          <a:ln w="17780">
-            <a:solidFill>
-              <a:srgbClr val="C51414"/>
-            </a:solidFill>
-            <a:prstDash val="solid"/>
-          </a:ln>
-        </p:spPr>
-      </p:sp>
-      <p:sp>
-        <p:nvSpPr>
-          <p:cNvPr id="10" name="Text 8"/>
-          <p:cNvSpPr/>
-          <p:nvPr/>
-        </p:nvSpPr>
-        <p:spPr>
-          <a:xfrm>
-            <a:off x="5504688" y="1627632"/>
             <a:ext cx="1197864" cy="502920"/>
           </a:xfrm>
           <a:prstGeom prst="rect">
@@ -1360,7 +1224,177 @@
                 <a:ea typeface="PingFang SC" pitchFamily="34" charset="-122"/>
                 <a:cs typeface="PingFang SC" pitchFamily="34" charset="-120"/>
               </a:rPr>
-              <a:t>MTE控制</a:t>
+              <a:t>Indexer</a:t>
+            </a:r>
+            <a:endParaRPr lang="en-US" sz="1500" dirty="0"/>
+          </a:p>
+          <a:p>
+            <a:pPr algn="ctr" indent="0" marL="0">
+              <a:buNone/>
+            </a:pPr>
+            <a:r>
+              <a:rPr lang="en-US" sz="1500" b="1" dirty="0">
+                <a:solidFill>
+                  <a:srgbClr val="C51414"/>
+                </a:solidFill>
+                <a:latin typeface="PingFang SC" pitchFamily="34" charset="0"/>
+                <a:ea typeface="PingFang SC" pitchFamily="34" charset="-122"/>
+                <a:cs typeface="PingFang SC" pitchFamily="34" charset="-120"/>
+              </a:rPr>
+              <a:t>Top-K</a:t>
+            </a:r>
+            <a:endParaRPr lang="en-US" sz="1500" dirty="0"/>
+          </a:p>
+        </p:txBody>
+      </p:sp>
+      <p:sp>
+        <p:nvSpPr>
+          <p:cNvPr id="7" name="Shape 5"/>
+          <p:cNvSpPr/>
+          <p:nvPr/>
+        </p:nvSpPr>
+        <p:spPr>
+          <a:xfrm>
+            <a:off x="3703320" y="1417320"/>
+            <a:ext cx="1417320" cy="2788920"/>
+          </a:xfrm>
+          <a:prstGeom prst="roundRect">
+            <a:avLst>
+              <a:gd name="adj" fmla="val 7742"/>
+            </a:avLst>
+          </a:prstGeom>
+          <a:solidFill>
+            <a:srgbClr val="FFF0F0"/>
+          </a:solidFill>
+          <a:ln w="17780">
+            <a:solidFill>
+              <a:srgbClr val="C51414"/>
+            </a:solidFill>
+            <a:prstDash val="solid"/>
+          </a:ln>
+        </p:spPr>
+      </p:sp>
+      <p:sp>
+        <p:nvSpPr>
+          <p:cNvPr id="8" name="Text 6"/>
+          <p:cNvSpPr/>
+          <p:nvPr/>
+        </p:nvSpPr>
+        <p:spPr>
+          <a:xfrm>
+            <a:off x="3813048" y="1627632"/>
+            <a:ext cx="1197864" cy="502920"/>
+          </a:xfrm>
+          <a:prstGeom prst="rect">
+            <a:avLst/>
+          </a:prstGeom>
+          <a:noFill/>
+          <a:ln/>
+        </p:spPr>
+        <p:txBody>
+          <a:bodyPr wrap="square" lIns="508" tIns="508" rIns="508" bIns="508" rtlCol="0" anchor="ctr">
+            <a:normAutofit/>
+          </a:bodyPr>
+          <a:lstStyle/>
+          <a:p>
+            <a:pPr algn="ctr" indent="0" marL="0">
+              <a:buNone/>
+            </a:pPr>
+            <a:r>
+              <a:rPr lang="en-US" sz="1500" b="1" dirty="0">
+                <a:solidFill>
+                  <a:srgbClr val="C51414"/>
+                </a:solidFill>
+                <a:latin typeface="PingFang SC" pitchFamily="34" charset="0"/>
+                <a:ea typeface="PingFang SC" pitchFamily="34" charset="-122"/>
+                <a:cs typeface="PingFang SC" pitchFamily="34" charset="-120"/>
+              </a:rPr>
+              <a:t>地址转换</a:t>
+            </a:r>
+            <a:endParaRPr lang="en-US" sz="1500" dirty="0"/>
+          </a:p>
+        </p:txBody>
+      </p:sp>
+      <p:sp>
+        <p:nvSpPr>
+          <p:cNvPr id="9" name="Shape 7"/>
+          <p:cNvSpPr/>
+          <p:nvPr/>
+        </p:nvSpPr>
+        <p:spPr>
+          <a:xfrm>
+            <a:off x="5394960" y="1417320"/>
+            <a:ext cx="1417320" cy="2788920"/>
+          </a:xfrm>
+          <a:prstGeom prst="roundRect">
+            <a:avLst>
+              <a:gd name="adj" fmla="val 7742"/>
+            </a:avLst>
+          </a:prstGeom>
+          <a:solidFill>
+            <a:srgbClr val="FFF0F0"/>
+          </a:solidFill>
+          <a:ln w="17780">
+            <a:solidFill>
+              <a:srgbClr val="C51414"/>
+            </a:solidFill>
+            <a:prstDash val="solid"/>
+          </a:ln>
+        </p:spPr>
+      </p:sp>
+      <p:sp>
+        <p:nvSpPr>
+          <p:cNvPr id="10" name="Text 8"/>
+          <p:cNvSpPr/>
+          <p:nvPr/>
+        </p:nvSpPr>
+        <p:spPr>
+          <a:xfrm>
+            <a:off x="5504688" y="1627632"/>
+            <a:ext cx="1197864" cy="502920"/>
+          </a:xfrm>
+          <a:prstGeom prst="rect">
+            <a:avLst/>
+          </a:prstGeom>
+          <a:noFill/>
+          <a:ln/>
+        </p:spPr>
+        <p:txBody>
+          <a:bodyPr wrap="square" lIns="508" tIns="508" rIns="508" bIns="508" rtlCol="0" anchor="ctr">
+            <a:normAutofit/>
+          </a:bodyPr>
+          <a:lstStyle/>
+          <a:p>
+            <a:pPr algn="ctr" indent="0" marL="0">
+              <a:buNone/>
+            </a:pPr>
+            <a:r>
+              <a:rPr lang="en-US" sz="1500" b="1" dirty="0">
+                <a:solidFill>
+                  <a:srgbClr val="C51414"/>
+                </a:solidFill>
+                <a:latin typeface="PingFang SC" pitchFamily="34" charset="0"/>
+                <a:ea typeface="PingFang SC" pitchFamily="34" charset="-122"/>
+                <a:cs typeface="PingFang SC" pitchFamily="34" charset="-120"/>
+              </a:rPr>
+              <a:t>MTE</a:t>
+            </a:r>
+            <a:endParaRPr lang="en-US" sz="1500" dirty="0"/>
+          </a:p>
+          <a:p>
+            <a:pPr algn="ctr" indent="0" marL="0">
+              <a:buNone/>
+            </a:pPr>
+            <a:r>
+              <a:rPr lang="en-US" sz="1500" b="1" dirty="0">
+                <a:solidFill>
+                  <a:srgbClr val="C51414"/>
+                </a:solidFill>
+                <a:latin typeface="PingFang SC" pitchFamily="34" charset="0"/>
+                <a:ea typeface="PingFang SC" pitchFamily="34" charset="-122"/>
+                <a:cs typeface="PingFang SC" pitchFamily="34" charset="-120"/>
+              </a:rPr>
+              <a:t>Completion</a:t>
             </a:r>
             <a:endParaRPr lang="en-US" sz="1500" dirty="0"/>
           </a:p>
@@ -1595,26 +1629,67 @@
         </p:nvSpPr>
         <p:spPr>
           <a:xfrm>
-            <a:off x="2514600" y="2331720"/>
-            <a:ext cx="411480" cy="594360"/>
+            <a:off x="2514600" y="2267712"/>
+            <a:ext cx="411480" cy="566928"/>
           </a:xfrm>
           <a:prstGeom prst="funnel">
             <a:avLst/>
           </a:prstGeom>
           <a:solidFill>
-            <a:srgbClr val="1F5FD1"/>
+            <a:srgbClr val="C51414"/>
           </a:solidFill>
           <a:ln w="12700">
             <a:solidFill>
-              <a:srgbClr val="1F5FD1"/>
-            </a:solidFill>
-            <a:prstDash val="solid"/>
-          </a:ln>
-        </p:spPr>
-      </p:sp>
-      <p:sp>
-        <p:nvSpPr>
-          <p:cNvPr id="18" name="Shape 16"/>
+              <a:srgbClr val="C51414"/>
+            </a:solidFill>
+            <a:prstDash val="solid"/>
+          </a:ln>
+        </p:spPr>
+      </p:sp>
+      <p:sp>
+        <p:nvSpPr>
+          <p:cNvPr id="18" name="Text 16"/>
+          <p:cNvSpPr/>
+          <p:nvPr/>
+        </p:nvSpPr>
+        <p:spPr>
+          <a:xfrm>
+            <a:off x="2331720" y="2944368"/>
+            <a:ext cx="777240" cy="164592"/>
+          </a:xfrm>
+          <a:prstGeom prst="rect">
+            <a:avLst/>
+          </a:prstGeom>
+          <a:noFill/>
+          <a:ln/>
+        </p:spPr>
+        <p:txBody>
+          <a:bodyPr wrap="square" lIns="635" tIns="635" rIns="635" bIns="635" rtlCol="0" anchor="ctr">
+            <a:normAutofit/>
+          </a:bodyPr>
+          <a:lstStyle/>
+          <a:p>
+            <a:pPr algn="ctr" indent="0" marL="0">
+              <a:buNone/>
+            </a:pPr>
+            <a:r>
+              <a:rPr lang="en-US" sz="1000" b="1" dirty="0">
+                <a:solidFill>
+                  <a:srgbClr val="C51414"/>
+                </a:solidFill>
+                <a:latin typeface="PingFang SC" pitchFamily="34" charset="0"/>
+                <a:ea typeface="PingFang SC" pitchFamily="34" charset="-122"/>
+                <a:cs typeface="PingFang SC" pitchFamily="34" charset="-120"/>
+              </a:rPr>
+              <a:t>Top-K</a:t>
+            </a:r>
+            <a:endParaRPr lang="en-US" sz="1000" dirty="0"/>
+          </a:p>
+        </p:txBody>
+      </p:sp>
+      <p:sp>
+        <p:nvSpPr>
+          <p:cNvPr id="19" name="Shape 17"/>
           <p:cNvSpPr/>
           <p:nvPr/>
         </p:nvSpPr>
@@ -1627,19 +1702,19 @@
             <a:avLst/>
           </a:prstGeom>
           <a:solidFill>
-            <a:srgbClr val="EAF2FF"/>
+            <a:srgbClr val="FFF0F0"/>
           </a:solidFill>
           <a:ln w="12700">
             <a:solidFill>
-              <a:srgbClr val="1F5FD1"/>
-            </a:solidFill>
-            <a:prstDash val="solid"/>
-          </a:ln>
-        </p:spPr>
-      </p:sp>
-      <p:sp>
-        <p:nvSpPr>
-          <p:cNvPr id="19" name="Shape 17"/>
+              <a:srgbClr val="C51414"/>
+            </a:solidFill>
+            <a:prstDash val="solid"/>
+          </a:ln>
+        </p:spPr>
+      </p:sp>
+      <p:sp>
+        <p:nvSpPr>
+          <p:cNvPr id="20" name="Shape 18"/>
           <p:cNvSpPr/>
           <p:nvPr/>
         </p:nvSpPr>
@@ -1654,15 +1729,15 @@
           <a:noFill/>
           <a:ln w="6985">
             <a:solidFill>
-              <a:srgbClr val="1F5FD1"/>
-            </a:solidFill>
-            <a:prstDash val="solid"/>
-          </a:ln>
-        </p:spPr>
-      </p:sp>
-      <p:sp>
-        <p:nvSpPr>
-          <p:cNvPr id="20" name="Shape 18"/>
+              <a:srgbClr val="C51414"/>
+            </a:solidFill>
+            <a:prstDash val="solid"/>
+          </a:ln>
+        </p:spPr>
+      </p:sp>
+      <p:sp>
+        <p:nvSpPr>
+          <p:cNvPr id="21" name="Shape 19"/>
           <p:cNvSpPr/>
           <p:nvPr/>
         </p:nvSpPr>
@@ -1677,15 +1752,15 @@
           <a:noFill/>
           <a:ln w="6985">
             <a:solidFill>
-              <a:srgbClr val="1F5FD1"/>
-            </a:solidFill>
-            <a:prstDash val="solid"/>
-          </a:ln>
-        </p:spPr>
-      </p:sp>
-      <p:sp>
-        <p:nvSpPr>
-          <p:cNvPr id="21" name="Shape 19"/>
+              <a:srgbClr val="C51414"/>
+            </a:solidFill>
+            <a:prstDash val="solid"/>
+          </a:ln>
+        </p:spPr>
+      </p:sp>
+      <p:sp>
+        <p:nvSpPr>
+          <p:cNvPr id="22" name="Shape 20"/>
           <p:cNvSpPr/>
           <p:nvPr/>
         </p:nvSpPr>
@@ -1700,15 +1775,15 @@
           <a:noFill/>
           <a:ln w="6985">
             <a:solidFill>
-              <a:srgbClr val="1F5FD1"/>
-            </a:solidFill>
-            <a:prstDash val="solid"/>
-          </a:ln>
-        </p:spPr>
-      </p:sp>
-      <p:sp>
-        <p:nvSpPr>
-          <p:cNvPr id="22" name="Shape 20"/>
+              <a:srgbClr val="C51414"/>
+            </a:solidFill>
+            <a:prstDash val="solid"/>
+          </a:ln>
+        </p:spPr>
+      </p:sp>
+      <p:sp>
+        <p:nvSpPr>
+          <p:cNvPr id="23" name="Shape 21"/>
           <p:cNvSpPr/>
           <p:nvPr/>
         </p:nvSpPr>
@@ -1723,15 +1798,15 @@
           <a:noFill/>
           <a:ln w="6985">
             <a:solidFill>
-              <a:srgbClr val="1F5FD1"/>
-            </a:solidFill>
-            <a:prstDash val="solid"/>
-          </a:ln>
-        </p:spPr>
-      </p:sp>
-      <p:sp>
-        <p:nvSpPr>
-          <p:cNvPr id="23" name="Shape 21"/>
+              <a:srgbClr val="C51414"/>
+            </a:solidFill>
+            <a:prstDash val="solid"/>
+          </a:ln>
+        </p:spPr>
+      </p:sp>
+      <p:sp>
+        <p:nvSpPr>
+          <p:cNvPr id="24" name="Shape 22"/>
           <p:cNvSpPr/>
           <p:nvPr/>
         </p:nvSpPr>
@@ -1758,7 +1833,7 @@
       </p:sp>
       <p:sp>
         <p:nvSpPr>
-          <p:cNvPr id="24" name="Text 22"/>
+          <p:cNvPr id="25" name="Text 23"/>
           <p:cNvSpPr/>
           <p:nvPr/>
         </p:nvSpPr>
@@ -1799,7 +1874,7 @@
       </p:sp>
       <p:sp>
         <p:nvSpPr>
-          <p:cNvPr id="25" name="Shape 23"/>
+          <p:cNvPr id="26" name="Shape 24"/>
           <p:cNvSpPr/>
           <p:nvPr/>
         </p:nvSpPr>
@@ -1824,7 +1899,7 @@
       </p:sp>
       <p:sp>
         <p:nvSpPr>
-          <p:cNvPr id="26" name="Shape 24"/>
+          <p:cNvPr id="27" name="Shape 25"/>
           <p:cNvSpPr/>
           <p:nvPr/>
         </p:nvSpPr>
@@ -1851,7 +1926,7 @@
       </p:sp>
       <p:sp>
         <p:nvSpPr>
-          <p:cNvPr id="27" name="Text 25"/>
+          <p:cNvPr id="28" name="Text 26"/>
           <p:cNvSpPr/>
           <p:nvPr/>
         </p:nvSpPr>
@@ -1892,7 +1967,7 @@
       </p:sp>
       <p:sp>
         <p:nvSpPr>
-          <p:cNvPr id="28" name="Shape 26"/>
+          <p:cNvPr id="29" name="Shape 27"/>
           <p:cNvSpPr/>
           <p:nvPr/>
         </p:nvSpPr>
@@ -1907,7 +1982,7 @@
           <a:noFill/>
           <a:ln w="29210">
             <a:solidFill>
-              <a:srgbClr val="1F5FD1"/>
+              <a:srgbClr val="C51414"/>
             </a:solidFill>
             <a:prstDash val="solid"/>
             <a:headEnd type="none"/>
@@ -1917,7 +1992,7 @@
       </p:sp>
       <p:sp>
         <p:nvSpPr>
-          <p:cNvPr id="29" name="Shape 27"/>
+          <p:cNvPr id="30" name="Shape 28"/>
           <p:cNvSpPr/>
           <p:nvPr/>
         </p:nvSpPr>
@@ -1932,7 +2007,7 @@
           <a:noFill/>
           <a:ln w="29210">
             <a:solidFill>
-              <a:srgbClr val="1F5FD1"/>
+              <a:srgbClr val="C51414"/>
             </a:solidFill>
             <a:prstDash val="solid"/>
             <a:headEnd type="none"/>
@@ -1942,7 +2017,7 @@
       </p:sp>
       <p:sp>
         <p:nvSpPr>
-          <p:cNvPr id="30" name="Shape 28"/>
+          <p:cNvPr id="31" name="Shape 29"/>
           <p:cNvSpPr/>
           <p:nvPr/>
         </p:nvSpPr>
@@ -1967,7 +2042,7 @@
       </p:sp>
       <p:sp>
         <p:nvSpPr>
-          <p:cNvPr id="31" name="Shape 29"/>
+          <p:cNvPr id="32" name="Shape 30"/>
           <p:cNvSpPr/>
           <p:nvPr/>
         </p:nvSpPr>
@@ -1992,7 +2067,7 @@
       </p:sp>
       <p:sp>
         <p:nvSpPr>
-          <p:cNvPr id="32" name="Shape 30"/>
+          <p:cNvPr id="33" name="Shape 31"/>
           <p:cNvSpPr/>
           <p:nvPr/>
         </p:nvSpPr>
@@ -2017,13 +2092,13 @@
       </p:sp>
       <p:sp>
         <p:nvSpPr>
-          <p:cNvPr id="33" name="Shape 31"/>
-          <p:cNvSpPr/>
-          <p:nvPr/>
-        </p:nvSpPr>
-        <p:spPr>
-          <a:xfrm>
-            <a:off x="5504688" y="2761488"/>
+          <p:cNvPr id="34" name="Shape 32"/>
+          <p:cNvSpPr/>
+          <p:nvPr/>
+        </p:nvSpPr>
+        <p:spPr>
+          <a:xfrm>
+            <a:off x="2121408" y="3310128"/>
             <a:ext cx="1207008" cy="329184"/>
           </a:xfrm>
           <a:prstGeom prst="roundRect">
@@ -2044,13 +2119,13 @@
       </p:sp>
       <p:sp>
         <p:nvSpPr>
-          <p:cNvPr id="34" name="Text 32"/>
-          <p:cNvSpPr/>
-          <p:nvPr/>
-        </p:nvSpPr>
-        <p:spPr>
-          <a:xfrm>
-            <a:off x="5541264" y="2788920"/>
+          <p:cNvPr id="35" name="Text 33"/>
+          <p:cNvSpPr/>
+          <p:nvPr/>
+        </p:nvSpPr>
+        <p:spPr>
+          <a:xfrm>
+            <a:off x="2157984" y="3337560"/>
             <a:ext cx="1133856" cy="219456"/>
           </a:xfrm>
           <a:prstGeom prst="rect">
@@ -2069,7 +2144,7 @@
               <a:buNone/>
             </a:pPr>
             <a:r>
-              <a:rPr lang="en-US" sz="970" b="1" dirty="0">
+              <a:rPr lang="en-US" sz="880" b="1" dirty="0">
                 <a:solidFill>
                   <a:srgbClr val="C51414"/>
                 </a:solidFill>
@@ -2077,21 +2152,21 @@
                 <a:ea typeface="PingFang SC" pitchFamily="34" charset="-122"/>
                 <a:cs typeface="PingFang SC" pitchFamily="34" charset="-120"/>
               </a:rPr>
-              <a:t>元数据查表</a:t>
-            </a:r>
-            <a:endParaRPr lang="en-US" sz="970" dirty="0"/>
-          </a:p>
-        </p:txBody>
-      </p:sp>
-      <p:sp>
-        <p:nvSpPr>
-          <p:cNvPr id="35" name="Shape 33"/>
-          <p:cNvSpPr/>
-          <p:nvPr/>
-        </p:nvSpPr>
-        <p:spPr>
-          <a:xfrm>
-            <a:off x="5504688" y="3218688"/>
+              <a:t>Aux K Cache</a:t>
+            </a:r>
+            <a:endParaRPr lang="en-US" sz="880" dirty="0"/>
+          </a:p>
+        </p:txBody>
+      </p:sp>
+      <p:sp>
+        <p:nvSpPr>
+          <p:cNvPr id="36" name="Shape 34"/>
+          <p:cNvSpPr/>
+          <p:nvPr/>
+        </p:nvSpPr>
+        <p:spPr>
+          <a:xfrm>
+            <a:off x="3794760" y="3310128"/>
             <a:ext cx="1207008" cy="329184"/>
           </a:xfrm>
           <a:prstGeom prst="roundRect">
@@ -2112,13 +2187,13 @@
       </p:sp>
       <p:sp>
         <p:nvSpPr>
-          <p:cNvPr id="36" name="Text 34"/>
-          <p:cNvSpPr/>
-          <p:nvPr/>
-        </p:nvSpPr>
-        <p:spPr>
-          <a:xfrm>
-            <a:off x="5541264" y="3246120"/>
+          <p:cNvPr id="37" name="Text 35"/>
+          <p:cNvSpPr/>
+          <p:nvPr/>
+        </p:nvSpPr>
+        <p:spPr>
+          <a:xfrm>
+            <a:off x="3831336" y="3337560"/>
             <a:ext cx="1133856" cy="219456"/>
           </a:xfrm>
           <a:prstGeom prst="rect">
@@ -2137,7 +2212,7 @@
               <a:buNone/>
             </a:pPr>
             <a:r>
-              <a:rPr lang="en-US" sz="970" b="1" dirty="0">
+              <a:rPr lang="en-US" sz="880" b="1" dirty="0">
                 <a:solidFill>
                   <a:srgbClr val="C51414"/>
                 </a:solidFill>
@@ -2145,15 +2220,15 @@
                 <a:ea typeface="PingFang SC" pitchFamily="34" charset="-122"/>
                 <a:cs typeface="PingFang SC" pitchFamily="34" charset="-120"/>
               </a:rPr>
-              <a:t>描述符生成</a:t>
-            </a:r>
-            <a:endParaRPr lang="en-US" sz="970" dirty="0"/>
-          </a:p>
-        </p:txBody>
-      </p:sp>
-      <p:sp>
-        <p:nvSpPr>
-          <p:cNvPr id="37" name="Shape 35"/>
+              <a:t>Global KV Addr</a:t>
+            </a:r>
+            <a:endParaRPr lang="en-US" sz="880" dirty="0"/>
+          </a:p>
+        </p:txBody>
+      </p:sp>
+      <p:sp>
+        <p:nvSpPr>
+          <p:cNvPr id="38" name="Shape 36"/>
           <p:cNvSpPr/>
           <p:nvPr/>
         </p:nvSpPr>
@@ -2180,7 +2255,7 @@
       </p:sp>
       <p:sp>
         <p:nvSpPr>
-          <p:cNvPr id="38" name="Text 36"/>
+          <p:cNvPr id="39" name="Text 37"/>
           <p:cNvSpPr/>
           <p:nvPr/>
         </p:nvSpPr>
@@ -2205,7 +2280,7 @@
               <a:buNone/>
             </a:pPr>
             <a:r>
-              <a:rPr lang="en-US" sz="970" b="1" dirty="0">
+              <a:rPr lang="en-US" sz="880" b="1" dirty="0">
                 <a:solidFill>
                   <a:srgbClr val="C51414"/>
                 </a:solidFill>
@@ -2215,13 +2290,81 @@
               </a:rPr>
               <a:t>Completion轮询</a:t>
             </a:r>
-            <a:endParaRPr lang="en-US" sz="970" dirty="0"/>
-          </a:p>
-        </p:txBody>
-      </p:sp>
-      <p:sp>
-        <p:nvSpPr>
-          <p:cNvPr id="39" name="Shape 37"/>
+            <a:endParaRPr lang="en-US" sz="880" dirty="0"/>
+          </a:p>
+        </p:txBody>
+      </p:sp>
+      <p:sp>
+        <p:nvSpPr>
+          <p:cNvPr id="40" name="Shape 38"/>
+          <p:cNvSpPr/>
+          <p:nvPr/>
+        </p:nvSpPr>
+        <p:spPr>
+          <a:xfrm>
+            <a:off x="1371600" y="4681728"/>
+            <a:ext cx="8778240" cy="228600"/>
+          </a:xfrm>
+          <a:prstGeom prst="roundRect">
+            <a:avLst>
+              <a:gd name="adj" fmla="val 20000"/>
+            </a:avLst>
+          </a:prstGeom>
+          <a:solidFill>
+            <a:srgbClr val="F4F7FB"/>
+          </a:solidFill>
+          <a:ln w="17780">
+            <a:solidFill>
+              <a:srgbClr val="B8C3D9"/>
+            </a:solidFill>
+            <a:prstDash val="solid"/>
+          </a:ln>
+        </p:spPr>
+      </p:sp>
+      <p:sp>
+        <p:nvSpPr>
+          <p:cNvPr id="41" name="Text 39"/>
+          <p:cNvSpPr/>
+          <p:nvPr/>
+        </p:nvSpPr>
+        <p:spPr>
+          <a:xfrm>
+            <a:off x="1408176" y="4718304"/>
+            <a:ext cx="8705088" cy="118872"/>
+          </a:xfrm>
+          <a:prstGeom prst="rect">
+            <a:avLst/>
+          </a:prstGeom>
+          <a:noFill/>
+          <a:ln/>
+        </p:spPr>
+        <p:txBody>
+          <a:bodyPr wrap="square" lIns="635" tIns="635" rIns="635" bIns="635" rtlCol="0" anchor="ctr">
+            <a:normAutofit/>
+          </a:bodyPr>
+          <a:lstStyle/>
+          <a:p>
+            <a:pPr algn="ctr" indent="0" marL="0">
+              <a:buNone/>
+            </a:pPr>
+            <a:r>
+              <a:rPr lang="en-US" sz="750" b="1" dirty="0">
+                <a:solidFill>
+                  <a:srgbClr val="5C667A"/>
+                </a:solidFill>
+                <a:latin typeface="PingFang SC" pitchFamily="34" charset="0"/>
+                <a:ea typeface="PingFang SC" pitchFamily="34" charset="-122"/>
+                <a:cs typeface="PingFang SC" pitchFamily="34" charset="-120"/>
+              </a:rPr>
+              <a:t>TensorRT-LLM DSA / GVR：Indexer、Top-K、地址转换进入Decode路径</a:t>
+            </a:r>
+            <a:endParaRPr lang="en-US" sz="750" dirty="0"/>
+          </a:p>
+        </p:txBody>
+      </p:sp>
+      <p:sp>
+        <p:nvSpPr>
+          <p:cNvPr id="42" name="Shape 40"/>
           <p:cNvSpPr/>
           <p:nvPr/>
         </p:nvSpPr>
@@ -2248,7 +2391,7 @@
       </p:sp>
       <p:sp>
         <p:nvSpPr>
-          <p:cNvPr id="40" name="Shape 38"/>
+          <p:cNvPr id="43" name="Shape 41"/>
           <p:cNvSpPr/>
           <p:nvPr/>
         </p:nvSpPr>
@@ -2275,7 +2418,7 @@
       </p:sp>
       <p:sp>
         <p:nvSpPr>
-          <p:cNvPr id="41" name="Text 39"/>
+          <p:cNvPr id="44" name="Text 42"/>
           <p:cNvSpPr/>
           <p:nvPr/>
         </p:nvSpPr>
@@ -2316,7 +2459,7 @@
       </p:sp>
       <p:sp>
         <p:nvSpPr>
-          <p:cNvPr id="42" name="Text 40"/>
+          <p:cNvPr id="45" name="Text 43"/>
           <p:cNvSpPr/>
           <p:nvPr/>
         </p:nvSpPr>
@@ -2341,7 +2484,7 @@
               <a:buNone/>
             </a:pPr>
             <a:r>
-              <a:rPr lang="en-US" sz="2200" b="1" dirty="0">
+              <a:rPr lang="en-US" sz="2100" b="1" dirty="0">
                 <a:solidFill>
                   <a:srgbClr val="08245C"/>
                 </a:solidFill>
@@ -2349,9 +2492,9 @@
                 <a:ea typeface="PingFang SC" pitchFamily="34" charset="-122"/>
                 <a:cs typeface="PingFang SC" pitchFamily="34" charset="-120"/>
               </a:rPr>
-              <a:t>小随机IO越多，NPU控制开销越高</a:t>
-            </a:r>
-            <a:endParaRPr lang="en-US" sz="2200" dirty="0"/>
+              <a:t>稀疏减少KV读取，但增加选择/控制开销</a:t>
+            </a:r>
+            <a:endParaRPr lang="en-US" sz="2100" dirty="0"/>
           </a:p>
         </p:txBody>
       </p:sp>
@@ -2422,7 +2565,7 @@
                 <a:ea typeface="PingFang SC" pitchFamily="34" charset="-122"/>
                 <a:cs typeface="PingFang SC" pitchFamily="34" charset="-120"/>
               </a:rPr>
-              <a:t>100M IOPS：逐请求协议栈不可持续</a:t>
+              <a:t>100M IOPS：Tiny Random I/O路径不可持续</a:t>
             </a:r>
             <a:endParaRPr lang="en-US" sz="2800" dirty="0"/>
           </a:p>
@@ -2490,7 +2633,7 @@
                 <a:ea typeface="PingFang SC" pitchFamily="34" charset="-122"/>
                 <a:cs typeface="PingFang SC" pitchFamily="34" charset="-120"/>
               </a:rPr>
-              <a:t>推理调度</a:t>
+              <a:t>DSA小块访问</a:t>
             </a:r>
             <a:endParaRPr lang="en-US" sz="1500" dirty="0"/>
           </a:p>
@@ -3243,7 +3386,7 @@
         </p:nvSpPr>
         <p:spPr>
           <a:xfrm>
-            <a:off x="7818120" y="1508760"/>
+            <a:off x="7818120" y="1353312"/>
             <a:ext cx="3063240" cy="621792"/>
           </a:xfrm>
           <a:prstGeom prst="roundRect">
@@ -3270,7 +3413,7 @@
         </p:nvSpPr>
         <p:spPr>
           <a:xfrm>
-            <a:off x="8074152" y="1627632"/>
+            <a:off x="8074152" y="1472184"/>
             <a:ext cx="384048" cy="384048"/>
           </a:xfrm>
           <a:prstGeom prst="ellipse">
@@ -3297,7 +3440,7 @@
         </p:nvSpPr>
         <p:spPr>
           <a:xfrm>
-            <a:off x="8074152" y="1636776"/>
+            <a:off x="8074152" y="1481328"/>
             <a:ext cx="384048" cy="347472"/>
           </a:xfrm>
           <a:prstGeom prst="rect">
@@ -3338,7 +3481,7 @@
         </p:nvSpPr>
         <p:spPr>
           <a:xfrm>
-            <a:off x="8567928" y="1636776"/>
+            <a:off x="8567928" y="1481328"/>
             <a:ext cx="1993392" cy="365760"/>
           </a:xfrm>
           <a:prstGeom prst="rect">
@@ -3357,7 +3500,7 @@
               <a:buNone/>
             </a:pPr>
             <a:r>
-              <a:rPr lang="en-US" sz="1800" b="1" dirty="0">
+              <a:rPr lang="en-US" sz="1550" b="1" dirty="0">
                 <a:solidFill>
                   <a:srgbClr val="F26A21"/>
                 </a:solidFill>
@@ -3365,9 +3508,9 @@
                 <a:ea typeface="PingFang SC" pitchFamily="34" charset="-122"/>
                 <a:cs typeface="PingFang SC" pitchFamily="34" charset="-120"/>
               </a:rPr>
-              <a:t>发起瓶颈</a:t>
-            </a:r>
-            <a:endParaRPr lang="en-US" sz="1800" dirty="0"/>
+              <a:t>Tiny Random I/O</a:t>
+            </a:r>
+            <a:endParaRPr lang="en-US" sz="1550" dirty="0"/>
           </a:p>
         </p:txBody>
       </p:sp>
@@ -3380,7 +3523,7 @@
         <p:spPr>
           <a:xfrm>
             <a:off x="6922008" y="2596896"/>
-            <a:ext cx="822960" cy="-777240"/>
+            <a:ext cx="822960" cy="-932688"/>
           </a:xfrm>
           <a:prstGeom prst="line">
             <a:avLst/>
@@ -3404,7 +3547,7 @@
         </p:nvSpPr>
         <p:spPr>
           <a:xfrm>
-            <a:off x="7818120" y="2487168"/>
+            <a:off x="7818120" y="2267712"/>
             <a:ext cx="3063240" cy="621792"/>
           </a:xfrm>
           <a:prstGeom prst="roundRect">
@@ -3431,7 +3574,7 @@
         </p:nvSpPr>
         <p:spPr>
           <a:xfrm>
-            <a:off x="8074152" y="2606040"/>
+            <a:off x="8074152" y="2386584"/>
             <a:ext cx="384048" cy="384048"/>
           </a:xfrm>
           <a:prstGeom prst="ellipse">
@@ -3458,7 +3601,7 @@
         </p:nvSpPr>
         <p:spPr>
           <a:xfrm>
-            <a:off x="8074152" y="2615184"/>
+            <a:off x="8074152" y="2395728"/>
             <a:ext cx="384048" cy="347472"/>
           </a:xfrm>
           <a:prstGeom prst="rect">
@@ -3499,7 +3642,7 @@
         </p:nvSpPr>
         <p:spPr>
           <a:xfrm>
-            <a:off x="8567928" y="2615184"/>
+            <a:off x="8567928" y="2395728"/>
             <a:ext cx="1993392" cy="365760"/>
           </a:xfrm>
           <a:prstGeom prst="rect">
@@ -3518,7 +3661,7 @@
               <a:buNone/>
             </a:pPr>
             <a:r>
-              <a:rPr lang="en-US" sz="1800" b="1" dirty="0">
+              <a:rPr lang="en-US" sz="1550" b="1" dirty="0">
                 <a:solidFill>
                   <a:srgbClr val="F26A21"/>
                 </a:solidFill>
@@ -3526,9 +3669,9 @@
                 <a:ea typeface="PingFang SC" pitchFamily="34" charset="-122"/>
                 <a:cs typeface="PingFang SC" pitchFamily="34" charset="-120"/>
               </a:rPr>
-              <a:t>链路瓶颈</a:t>
-            </a:r>
-            <a:endParaRPr lang="en-US" sz="1800" dirty="0"/>
+              <a:t>CPU-centric发起</a:t>
+            </a:r>
+            <a:endParaRPr lang="en-US" sz="1550" dirty="0"/>
           </a:p>
         </p:txBody>
       </p:sp>
@@ -3541,7 +3684,7 @@
         <p:spPr>
           <a:xfrm>
             <a:off x="6922008" y="2596896"/>
-            <a:ext cx="822960" cy="201168"/>
+            <a:ext cx="822960" cy="-18288"/>
           </a:xfrm>
           <a:prstGeom prst="line">
             <a:avLst/>
@@ -3565,7 +3708,7 @@
         </p:nvSpPr>
         <p:spPr>
           <a:xfrm>
-            <a:off x="7818120" y="3465576"/>
+            <a:off x="7818120" y="3182112"/>
             <a:ext cx="3063240" cy="621792"/>
           </a:xfrm>
           <a:prstGeom prst="roundRect">
@@ -3592,7 +3735,7 @@
         </p:nvSpPr>
         <p:spPr>
           <a:xfrm>
-            <a:off x="8074152" y="3584448"/>
+            <a:off x="8074152" y="3300984"/>
             <a:ext cx="384048" cy="384048"/>
           </a:xfrm>
           <a:prstGeom prst="ellipse">
@@ -3619,7 +3762,7 @@
         </p:nvSpPr>
         <p:spPr>
           <a:xfrm>
-            <a:off x="8074152" y="3593592"/>
+            <a:off x="8074152" y="3310128"/>
             <a:ext cx="384048" cy="347472"/>
           </a:xfrm>
           <a:prstGeom prst="rect">
@@ -3660,7 +3803,7 @@
         </p:nvSpPr>
         <p:spPr>
           <a:xfrm>
-            <a:off x="8567928" y="3593592"/>
+            <a:off x="8567928" y="3310128"/>
             <a:ext cx="1993392" cy="365760"/>
           </a:xfrm>
           <a:prstGeom prst="rect">
@@ -3702,7 +3845,7 @@
         <p:spPr>
           <a:xfrm>
             <a:off x="6922008" y="2596896"/>
-            <a:ext cx="822960" cy="1179576"/>
+            <a:ext cx="822960" cy="896112"/>
           </a:xfrm>
           <a:prstGeom prst="line">
             <a:avLst/>
@@ -3721,6 +3864,74 @@
       <p:sp>
         <p:nvSpPr>
           <p:cNvPr id="44" name="Shape 42"/>
+          <p:cNvSpPr/>
+          <p:nvPr/>
+        </p:nvSpPr>
+        <p:spPr>
+          <a:xfrm>
+            <a:off x="1298448" y="5193792"/>
+            <a:ext cx="9052560" cy="228600"/>
+          </a:xfrm>
+          <a:prstGeom prst="roundRect">
+            <a:avLst>
+              <a:gd name="adj" fmla="val 20000"/>
+            </a:avLst>
+          </a:prstGeom>
+          <a:solidFill>
+            <a:srgbClr val="F4F7FB"/>
+          </a:solidFill>
+          <a:ln w="17780">
+            <a:solidFill>
+              <a:srgbClr val="B8C3D9"/>
+            </a:solidFill>
+            <a:prstDash val="solid"/>
+          </a:ln>
+        </p:spPr>
+      </p:sp>
+      <p:sp>
+        <p:nvSpPr>
+          <p:cNvPr id="45" name="Text 43"/>
+          <p:cNvSpPr/>
+          <p:nvPr/>
+        </p:nvSpPr>
+        <p:spPr>
+          <a:xfrm>
+            <a:off x="1335024" y="5230368"/>
+            <a:ext cx="8979408" cy="118872"/>
+          </a:xfrm>
+          <a:prstGeom prst="rect">
+            <a:avLst/>
+          </a:prstGeom>
+          <a:noFill/>
+          <a:ln/>
+        </p:spPr>
+        <p:txBody>
+          <a:bodyPr wrap="square" lIns="635" tIns="635" rIns="635" bIns="635" rtlCol="0" anchor="ctr">
+            <a:normAutofit/>
+          </a:bodyPr>
+          <a:lstStyle/>
+          <a:p>
+            <a:pPr algn="ctr" indent="0" marL="0">
+              <a:buNone/>
+            </a:pPr>
+            <a:r>
+              <a:rPr lang="en-US" sz="750" b="1" dirty="0">
+                <a:solidFill>
+                  <a:srgbClr val="5C667A"/>
+                </a:solidFill>
+                <a:latin typeface="PingFang SC" pitchFamily="34" charset="0"/>
+                <a:ea typeface="PingFang SC" pitchFamily="34" charset="-122"/>
+                <a:cs typeface="PingFang SC" pitchFamily="34" charset="-120"/>
+              </a:rPr>
+              <a:t>Tutti：碎片化GPU内存产生大量tiny random I/O；GDS仍依赖CPU发起</a:t>
+            </a:r>
+            <a:endParaRPr lang="en-US" sz="750" dirty="0"/>
+          </a:p>
+        </p:txBody>
+      </p:sp>
+      <p:sp>
+        <p:nvSpPr>
+          <p:cNvPr id="46" name="Shape 44"/>
           <p:cNvSpPr/>
           <p:nvPr/>
         </p:nvSpPr>
@@ -3747,7 +3958,7 @@
       </p:sp>
       <p:sp>
         <p:nvSpPr>
-          <p:cNvPr id="45" name="Text 43"/>
+          <p:cNvPr id="47" name="Text 45"/>
           <p:cNvSpPr/>
           <p:nvPr/>
         </p:nvSpPr>
@@ -3772,7 +3983,7 @@
               <a:buNone/>
             </a:pPr>
             <a:r>
-              <a:rPr lang="en-US" sz="2100" b="1" dirty="0">
+              <a:rPr lang="en-US" sz="2000" b="1" dirty="0">
                 <a:solidFill>
                   <a:srgbClr val="FFFFFF"/>
                 </a:solidFill>
@@ -3780,9 +3991,9 @@
                 <a:ea typeface="PingFang SC" pitchFamily="34" charset="-122"/>
                 <a:cs typeface="PingFang SC" pitchFamily="34" charset="-120"/>
               </a:rPr>
-              <a:t>必须批处理、旁路、硬件队列</a:t>
-            </a:r>
-            <a:endParaRPr lang="en-US" sz="2100" dirty="0"/>
+              <a:t>逐请求软件路径会卡在发起、链路和完成</a:t>
+            </a:r>
+            <a:endParaRPr lang="en-US" sz="2000" dirty="0"/>
           </a:p>
         </p:txBody>
       </p:sp>
@@ -3853,7 +4064,7 @@
                 <a:ea typeface="PingFang SC" pitchFamily="34" charset="-122"/>
                 <a:cs typeface="PingFang SC" pitchFamily="34" charset="-120"/>
               </a:rPr>
-              <a:t>现有问题：多协议生态压到NPU侧</a:t>
+              <a:t>生态问题：Connector与Metadata压到NPU侧</a:t>
             </a:r>
             <a:endParaRPr lang="en-US" sz="2800" dirty="0"/>
           </a:p>
@@ -4388,8 +4599,8 @@
         </p:nvSpPr>
         <p:spPr>
           <a:xfrm>
-            <a:off x="4663440" y="1700784"/>
-            <a:ext cx="2286000" cy="365760"/>
+            <a:off x="4663440" y="1627632"/>
+            <a:ext cx="2286000" cy="329184"/>
           </a:xfrm>
           <a:prstGeom prst="rect">
             <a:avLst/>
@@ -4407,7 +4618,7 @@
               <a:buNone/>
             </a:pPr>
             <a:r>
-              <a:rPr lang="en-US" sz="2200" b="1" dirty="0">
+              <a:rPr lang="en-US" sz="2100" b="1" dirty="0">
                 <a:solidFill>
                   <a:srgbClr val="C51414"/>
                 </a:solidFill>
@@ -4417,13 +4628,54 @@
               </a:rPr>
               <a:t>NPU适配层</a:t>
             </a:r>
-            <a:endParaRPr lang="en-US" sz="2200" dirty="0"/>
-          </a:p>
-        </p:txBody>
-      </p:sp>
-      <p:sp>
-        <p:nvSpPr>
-          <p:cNvPr id="21" name="Shape 19"/>
+            <a:endParaRPr lang="en-US" sz="2100" dirty="0"/>
+          </a:p>
+        </p:txBody>
+      </p:sp>
+      <p:sp>
+        <p:nvSpPr>
+          <p:cNvPr id="21" name="Text 19"/>
+          <p:cNvSpPr/>
+          <p:nvPr/>
+        </p:nvSpPr>
+        <p:spPr>
+          <a:xfrm>
+            <a:off x="4681728" y="1975104"/>
+            <a:ext cx="2286000" cy="201168"/>
+          </a:xfrm>
+          <a:prstGeom prst="rect">
+            <a:avLst/>
+          </a:prstGeom>
+          <a:noFill/>
+          <a:ln/>
+        </p:spPr>
+        <p:txBody>
+          <a:bodyPr wrap="square" lIns="635" tIns="635" rIns="635" bIns="635" rtlCol="0" anchor="ctr">
+            <a:normAutofit/>
+          </a:bodyPr>
+          <a:lstStyle/>
+          <a:p>
+            <a:pPr algn="ctr" indent="0" marL="0">
+              <a:buNone/>
+            </a:pPr>
+            <a:r>
+              <a:rPr lang="en-US" sz="1220" b="1" dirty="0">
+                <a:solidFill>
+                  <a:srgbClr val="C51414"/>
+                </a:solidFill>
+                <a:latin typeface="PingFang SC" pitchFamily="34" charset="0"/>
+                <a:ea typeface="PingFang SC" pitchFamily="34" charset="-122"/>
+                <a:cs typeface="PingFang SC" pitchFamily="34" charset="-120"/>
+              </a:rPr>
+              <a:t>Connector / Metadata</a:t>
+            </a:r>
+            <a:endParaRPr lang="en-US" sz="1220" dirty="0"/>
+          </a:p>
+        </p:txBody>
+      </p:sp>
+      <p:sp>
+        <p:nvSpPr>
+          <p:cNvPr id="22" name="Shape 20"/>
           <p:cNvSpPr/>
           <p:nvPr/>
         </p:nvSpPr>
@@ -4450,7 +4702,7 @@
       </p:sp>
       <p:sp>
         <p:nvSpPr>
-          <p:cNvPr id="22" name="Shape 20"/>
+          <p:cNvPr id="23" name="Shape 21"/>
           <p:cNvSpPr/>
           <p:nvPr/>
         </p:nvSpPr>
@@ -4473,7 +4725,7 @@
       </p:sp>
       <p:sp>
         <p:nvSpPr>
-          <p:cNvPr id="23" name="Shape 21"/>
+          <p:cNvPr id="24" name="Shape 22"/>
           <p:cNvSpPr/>
           <p:nvPr/>
         </p:nvSpPr>
@@ -4496,7 +4748,7 @@
       </p:sp>
       <p:sp>
         <p:nvSpPr>
-          <p:cNvPr id="24" name="Shape 22"/>
+          <p:cNvPr id="25" name="Shape 23"/>
           <p:cNvSpPr/>
           <p:nvPr/>
         </p:nvSpPr>
@@ -4519,7 +4771,7 @@
       </p:sp>
       <p:sp>
         <p:nvSpPr>
-          <p:cNvPr id="25" name="Shape 23"/>
+          <p:cNvPr id="26" name="Shape 24"/>
           <p:cNvSpPr/>
           <p:nvPr/>
         </p:nvSpPr>
@@ -4542,7 +4794,7 @@
       </p:sp>
       <p:sp>
         <p:nvSpPr>
-          <p:cNvPr id="26" name="Text 24"/>
+          <p:cNvPr id="27" name="Text 25"/>
           <p:cNvSpPr/>
           <p:nvPr/>
         </p:nvSpPr>
@@ -4583,7 +4835,7 @@
       </p:sp>
       <p:sp>
         <p:nvSpPr>
-          <p:cNvPr id="27" name="Shape 25"/>
+          <p:cNvPr id="28" name="Shape 26"/>
           <p:cNvSpPr/>
           <p:nvPr/>
         </p:nvSpPr>
@@ -4610,7 +4862,7 @@
       </p:sp>
       <p:sp>
         <p:nvSpPr>
-          <p:cNvPr id="28" name="Shape 26"/>
+          <p:cNvPr id="29" name="Shape 27"/>
           <p:cNvSpPr/>
           <p:nvPr/>
         </p:nvSpPr>
@@ -4635,7 +4887,7 @@
       </p:sp>
       <p:sp>
         <p:nvSpPr>
-          <p:cNvPr id="29" name="Shape 27"/>
+          <p:cNvPr id="30" name="Shape 28"/>
           <p:cNvSpPr/>
           <p:nvPr/>
         </p:nvSpPr>
@@ -4660,7 +4912,7 @@
       </p:sp>
       <p:sp>
         <p:nvSpPr>
-          <p:cNvPr id="30" name="Shape 28"/>
+          <p:cNvPr id="31" name="Shape 29"/>
           <p:cNvSpPr/>
           <p:nvPr/>
         </p:nvSpPr>
@@ -4685,7 +4937,7 @@
       </p:sp>
       <p:sp>
         <p:nvSpPr>
-          <p:cNvPr id="31" name="Shape 29"/>
+          <p:cNvPr id="32" name="Shape 30"/>
           <p:cNvSpPr/>
           <p:nvPr/>
         </p:nvSpPr>
@@ -4708,7 +4960,7 @@
       </p:sp>
       <p:sp>
         <p:nvSpPr>
-          <p:cNvPr id="32" name="Shape 30"/>
+          <p:cNvPr id="33" name="Shape 31"/>
           <p:cNvSpPr/>
           <p:nvPr/>
         </p:nvSpPr>
@@ -4731,7 +4983,7 @@
       </p:sp>
       <p:sp>
         <p:nvSpPr>
-          <p:cNvPr id="33" name="Shape 31"/>
+          <p:cNvPr id="34" name="Shape 32"/>
           <p:cNvSpPr/>
           <p:nvPr/>
         </p:nvSpPr>
@@ -4754,7 +5006,7 @@
       </p:sp>
       <p:sp>
         <p:nvSpPr>
-          <p:cNvPr id="34" name="Text 32"/>
+          <p:cNvPr id="35" name="Text 33"/>
           <p:cNvSpPr/>
           <p:nvPr/>
         </p:nvSpPr>
@@ -4795,7 +5047,7 @@
       </p:sp>
       <p:sp>
         <p:nvSpPr>
-          <p:cNvPr id="35" name="Shape 33"/>
+          <p:cNvPr id="36" name="Shape 34"/>
           <p:cNvSpPr/>
           <p:nvPr/>
         </p:nvSpPr>
@@ -4822,7 +5074,7 @@
       </p:sp>
       <p:sp>
         <p:nvSpPr>
-          <p:cNvPr id="36" name="Shape 34"/>
+          <p:cNvPr id="37" name="Shape 35"/>
           <p:cNvSpPr/>
           <p:nvPr/>
         </p:nvSpPr>
@@ -4847,7 +5099,7 @@
       </p:sp>
       <p:sp>
         <p:nvSpPr>
-          <p:cNvPr id="37" name="Shape 35"/>
+          <p:cNvPr id="38" name="Shape 36"/>
           <p:cNvSpPr/>
           <p:nvPr/>
         </p:nvSpPr>
@@ -4872,7 +5124,7 @@
       </p:sp>
       <p:sp>
         <p:nvSpPr>
-          <p:cNvPr id="38" name="Shape 36"/>
+          <p:cNvPr id="39" name="Shape 37"/>
           <p:cNvSpPr/>
           <p:nvPr/>
         </p:nvSpPr>
@@ -4897,7 +5149,7 @@
       </p:sp>
       <p:sp>
         <p:nvSpPr>
-          <p:cNvPr id="39" name="Text 37"/>
+          <p:cNvPr id="40" name="Text 38"/>
           <p:cNvSpPr/>
           <p:nvPr/>
         </p:nvSpPr>
@@ -4938,7 +5190,7 @@
       </p:sp>
       <p:sp>
         <p:nvSpPr>
-          <p:cNvPr id="40" name="Shape 38"/>
+          <p:cNvPr id="41" name="Shape 39"/>
           <p:cNvSpPr/>
           <p:nvPr/>
         </p:nvSpPr>
@@ -4965,7 +5217,7 @@
       </p:sp>
       <p:sp>
         <p:nvSpPr>
-          <p:cNvPr id="41" name="Shape 39"/>
+          <p:cNvPr id="42" name="Shape 40"/>
           <p:cNvSpPr/>
           <p:nvPr/>
         </p:nvSpPr>
@@ -4990,7 +5242,7 @@
       </p:sp>
       <p:sp>
         <p:nvSpPr>
-          <p:cNvPr id="42" name="Text 40"/>
+          <p:cNvPr id="43" name="Text 41"/>
           <p:cNvSpPr/>
           <p:nvPr/>
         </p:nvSpPr>
@@ -5031,7 +5283,7 @@
       </p:sp>
       <p:sp>
         <p:nvSpPr>
-          <p:cNvPr id="43" name="Text 41"/>
+          <p:cNvPr id="44" name="Text 42"/>
           <p:cNvSpPr/>
           <p:nvPr/>
         </p:nvSpPr>
@@ -5072,7 +5324,7 @@
       </p:sp>
       <p:sp>
         <p:nvSpPr>
-          <p:cNvPr id="44" name="Shape 42"/>
+          <p:cNvPr id="45" name="Shape 43"/>
           <p:cNvSpPr/>
           <p:nvPr/>
         </p:nvSpPr>
@@ -5099,7 +5351,7 @@
       </p:sp>
       <p:sp>
         <p:nvSpPr>
-          <p:cNvPr id="45" name="Shape 43"/>
+          <p:cNvPr id="46" name="Shape 44"/>
           <p:cNvSpPr/>
           <p:nvPr/>
         </p:nvSpPr>
@@ -5126,7 +5378,7 @@
       </p:sp>
       <p:sp>
         <p:nvSpPr>
-          <p:cNvPr id="46" name="Text 44"/>
+          <p:cNvPr id="47" name="Text 45"/>
           <p:cNvSpPr/>
           <p:nvPr/>
         </p:nvSpPr>
@@ -5167,7 +5419,7 @@
       </p:sp>
       <p:sp>
         <p:nvSpPr>
-          <p:cNvPr id="47" name="Text 45"/>
+          <p:cNvPr id="48" name="Text 46"/>
           <p:cNvSpPr/>
           <p:nvPr/>
         </p:nvSpPr>
@@ -5208,7 +5460,7 @@
       </p:sp>
       <p:sp>
         <p:nvSpPr>
-          <p:cNvPr id="48" name="Shape 46"/>
+          <p:cNvPr id="49" name="Shape 47"/>
           <p:cNvSpPr/>
           <p:nvPr/>
         </p:nvSpPr>
@@ -5235,7 +5487,7 @@
       </p:sp>
       <p:sp>
         <p:nvSpPr>
-          <p:cNvPr id="49" name="Shape 47"/>
+          <p:cNvPr id="50" name="Shape 48"/>
           <p:cNvSpPr/>
           <p:nvPr/>
         </p:nvSpPr>
@@ -5262,7 +5514,7 @@
       </p:sp>
       <p:sp>
         <p:nvSpPr>
-          <p:cNvPr id="50" name="Text 48"/>
+          <p:cNvPr id="51" name="Text 49"/>
           <p:cNvSpPr/>
           <p:nvPr/>
         </p:nvSpPr>
@@ -5303,7 +5555,7 @@
       </p:sp>
       <p:sp>
         <p:nvSpPr>
-          <p:cNvPr id="51" name="Text 49"/>
+          <p:cNvPr id="52" name="Text 50"/>
           <p:cNvSpPr/>
           <p:nvPr/>
         </p:nvSpPr>
@@ -5336,7 +5588,7 @@
                 <a:ea typeface="PingFang SC" pitchFamily="34" charset="-122"/>
                 <a:cs typeface="PingFang SC" pitchFamily="34" charset="-120"/>
               </a:rPr>
-              <a:t>驱动绑定</a:t>
+              <a:t>元数据分散</a:t>
             </a:r>
             <a:endParaRPr lang="en-US" sz="1800" dirty="0"/>
           </a:p>
@@ -5344,7 +5596,7 @@
       </p:sp>
       <p:sp>
         <p:nvSpPr>
-          <p:cNvPr id="52" name="Shape 50"/>
+          <p:cNvPr id="53" name="Shape 51"/>
           <p:cNvSpPr/>
           <p:nvPr/>
         </p:nvSpPr>
@@ -5371,7 +5623,7 @@
       </p:sp>
       <p:sp>
         <p:nvSpPr>
-          <p:cNvPr id="53" name="Shape 51"/>
+          <p:cNvPr id="54" name="Shape 52"/>
           <p:cNvSpPr/>
           <p:nvPr/>
         </p:nvSpPr>
@@ -5398,7 +5650,7 @@
       </p:sp>
       <p:sp>
         <p:nvSpPr>
-          <p:cNvPr id="54" name="Text 52"/>
+          <p:cNvPr id="55" name="Text 53"/>
           <p:cNvSpPr/>
           <p:nvPr/>
         </p:nvSpPr>
@@ -5439,7 +5691,7 @@
       </p:sp>
       <p:sp>
         <p:nvSpPr>
-          <p:cNvPr id="55" name="Text 53"/>
+          <p:cNvPr id="56" name="Text 54"/>
           <p:cNvSpPr/>
           <p:nvPr/>
         </p:nvSpPr>
@@ -5480,7 +5732,7 @@
       </p:sp>
       <p:sp>
         <p:nvSpPr>
-          <p:cNvPr id="56" name="Shape 54"/>
+          <p:cNvPr id="57" name="Shape 55"/>
           <p:cNvSpPr/>
           <p:nvPr/>
         </p:nvSpPr>
@@ -5505,7 +5757,7 @@
       </p:sp>
       <p:sp>
         <p:nvSpPr>
-          <p:cNvPr id="57" name="Shape 55"/>
+          <p:cNvPr id="58" name="Shape 56"/>
           <p:cNvSpPr/>
           <p:nvPr/>
         </p:nvSpPr>
@@ -5530,7 +5782,7 @@
       </p:sp>
       <p:sp>
         <p:nvSpPr>
-          <p:cNvPr id="58" name="Shape 56"/>
+          <p:cNvPr id="59" name="Shape 57"/>
           <p:cNvSpPr/>
           <p:nvPr/>
         </p:nvSpPr>
@@ -5555,7 +5807,7 @@
       </p:sp>
       <p:sp>
         <p:nvSpPr>
-          <p:cNvPr id="59" name="Shape 57"/>
+          <p:cNvPr id="60" name="Shape 58"/>
           <p:cNvSpPr/>
           <p:nvPr/>
         </p:nvSpPr>
@@ -5580,7 +5832,7 @@
       </p:sp>
       <p:sp>
         <p:nvSpPr>
-          <p:cNvPr id="60" name="Shape 58"/>
+          <p:cNvPr id="61" name="Shape 59"/>
           <p:cNvSpPr/>
           <p:nvPr/>
         </p:nvSpPr>
@@ -5605,7 +5857,7 @@
       </p:sp>
       <p:sp>
         <p:nvSpPr>
-          <p:cNvPr id="61" name="Shape 59"/>
+          <p:cNvPr id="62" name="Shape 60"/>
           <p:cNvSpPr/>
           <p:nvPr/>
         </p:nvSpPr>
@@ -5630,7 +5882,75 @@
       </p:sp>
       <p:sp>
         <p:nvSpPr>
-          <p:cNvPr id="62" name="Shape 60"/>
+          <p:cNvPr id="63" name="Shape 61"/>
+          <p:cNvSpPr/>
+          <p:nvPr/>
+        </p:nvSpPr>
+        <p:spPr>
+          <a:xfrm>
+            <a:off x="1572768" y="5138928"/>
+            <a:ext cx="8321040" cy="228600"/>
+          </a:xfrm>
+          <a:prstGeom prst="roundRect">
+            <a:avLst>
+              <a:gd name="adj" fmla="val 20000"/>
+            </a:avLst>
+          </a:prstGeom>
+          <a:solidFill>
+            <a:srgbClr val="F4F7FB"/>
+          </a:solidFill>
+          <a:ln w="17780">
+            <a:solidFill>
+              <a:srgbClr val="B8C3D9"/>
+            </a:solidFill>
+            <a:prstDash val="solid"/>
+          </a:ln>
+        </p:spPr>
+      </p:sp>
+      <p:sp>
+        <p:nvSpPr>
+          <p:cNvPr id="64" name="Text 62"/>
+          <p:cNvSpPr/>
+          <p:nvPr/>
+        </p:nvSpPr>
+        <p:spPr>
+          <a:xfrm>
+            <a:off x="1609344" y="5175504"/>
+            <a:ext cx="8247888" cy="118872"/>
+          </a:xfrm>
+          <a:prstGeom prst="rect">
+            <a:avLst/>
+          </a:prstGeom>
+          <a:noFill/>
+          <a:ln/>
+        </p:spPr>
+        <p:txBody>
+          <a:bodyPr wrap="square" lIns="635" tIns="635" rIns="635" bIns="635" rtlCol="0" anchor="ctr">
+            <a:normAutofit/>
+          </a:bodyPr>
+          <a:lstStyle/>
+          <a:p>
+            <a:pPr algn="ctr" indent="0" marL="0">
+              <a:buNone/>
+            </a:pPr>
+            <a:r>
+              <a:rPr lang="en-US" sz="750" b="1" dirty="0">
+                <a:solidFill>
+                  <a:srgbClr val="5C667A"/>
+                </a:solidFill>
+                <a:latin typeface="PingFang SC" pitchFamily="34" charset="0"/>
+                <a:ea typeface="PingFang SC" pitchFamily="34" charset="-122"/>
+                <a:cs typeface="PingFang SC" pitchFamily="34" charset="-120"/>
+              </a:rPr>
+              <a:t>LMCache / SPIN：多KV布局、多存储层需要统一connector与metadata</a:t>
+            </a:r>
+            <a:endParaRPr lang="en-US" sz="750" dirty="0"/>
+          </a:p>
+        </p:txBody>
+      </p:sp>
+      <p:sp>
+        <p:nvSpPr>
+          <p:cNvPr id="65" name="Shape 63"/>
           <p:cNvSpPr/>
           <p:nvPr/>
         </p:nvSpPr>
@@ -5657,7 +5977,7 @@
       </p:sp>
       <p:sp>
         <p:nvSpPr>
-          <p:cNvPr id="63" name="Text 61"/>
+          <p:cNvPr id="66" name="Text 64"/>
           <p:cNvSpPr/>
           <p:nvPr/>
         </p:nvSpPr>
@@ -5682,7 +6002,7 @@
               <a:buNone/>
             </a:pPr>
             <a:r>
-              <a:rPr lang="en-US" sz="2050" b="1" dirty="0">
+              <a:rPr lang="en-US" sz="2000" b="1" dirty="0">
                 <a:solidFill>
                   <a:srgbClr val="08245C"/>
                 </a:solidFill>
@@ -5690,9 +6010,9 @@
                 <a:ea typeface="PingFang SC" pitchFamily="34" charset="-122"/>
                 <a:cs typeface="PingFang SC" pitchFamily="34" charset="-120"/>
               </a:rPr>
-              <a:t>多语义、多协议进入NPU热路径，兼容成本上升</a:t>
-            </a:r>
-            <a:endParaRPr lang="en-US" sz="2050" dirty="0"/>
+              <a:t>多语义、多协议、多KV布局让NPU适配成本上升</a:t>
+            </a:r>
+            <a:endParaRPr lang="en-US" sz="2000" dirty="0"/>
           </a:p>
         </p:txBody>
       </p:sp>
